--- a/docs/pitch/CryoDispatch.pptx
+++ b/docs/pitch/CryoDispatch.pptx
@@ -949,7 +949,7 @@
           <a:p>
             <a:r>
               <a:rPr lang="en-US" dirty="0"/>
-              <a:t/>
+              <a:t>Numbers are from a live run: hold 0.468 kWh vs move 0.220 kWh. Cascade target is FREEZER_BLOOD_06 (ICU satellite 2).</a:t>
             </a:r>
             <a:endParaRPr lang="en-US" dirty="0"/>
           </a:p>
@@ -4110,7 +4110,7 @@
                 <a:ea typeface="Cambria" pitchFamily="34" charset="-122"/>
                 <a:cs typeface="Cambria" pitchFamily="34" charset="-120"/>
               </a:rPr>
-              <a:t>Ninety seconds. A judge holds the phone.</a:t>
+              <a:t>The loop closes on evidence, not an alert</a:t>
             </a:r>
             <a:endParaRPr lang="en-US" sz="2800" dirty="0"/>
           </a:p>
@@ -4125,11 +4125,11 @@
         <p:spPr>
           <a:xfrm>
             <a:off x="548640" y="1143000"/>
-            <a:ext cx="3611880" cy="2240280"/>
+            <a:ext cx="5486400" cy="4937760"/>
           </a:xfrm>
           <a:prstGeom prst="roundRect">
             <a:avLst>
-              <a:gd name="adj" fmla="val 4082"/>
+              <a:gd name="adj" fmla="val 2222"/>
             </a:avLst>
           </a:prstGeom>
           <a:solidFill>
@@ -4140,23 +4140,42 @@
       </p:sp>
       <p:sp>
         <p:nvSpPr>
-          <p:cNvPr id="5" name="Shape 3"/>
-          <p:cNvSpPr/>
-          <p:nvPr/>
-        </p:nvSpPr>
-        <p:spPr>
-          <a:xfrm>
-            <a:off x="777240" y="1417320"/>
-            <a:ext cx="384048" cy="384048"/>
-          </a:xfrm>
-          <a:prstGeom prst="ellipse">
-            <a:avLst/>
-          </a:prstGeom>
-          <a:solidFill>
-            <a:srgbClr val="2EC4B6"/>
-          </a:solidFill>
-          <a:ln/>
-        </p:spPr>
+          <p:cNvPr id="5" name="Text 3"/>
+          <p:cNvSpPr/>
+          <p:nvPr/>
+        </p:nvSpPr>
+        <p:spPr>
+          <a:xfrm>
+            <a:off x="822960" y="1371600"/>
+            <a:ext cx="4937760" cy="457200"/>
+          </a:xfrm>
+          <a:prstGeom prst="rect">
+            <a:avLst/>
+          </a:prstGeom>
+          <a:noFill/>
+          <a:ln/>
+        </p:spPr>
+        <p:txBody>
+          <a:bodyPr wrap="square" lIns="0" tIns="0" rIns="0" bIns="0" rtlCol="0" anchor="ctr"/>
+          <a:lstStyle/>
+          <a:p>
+            <a:pPr indent="0" marL="0">
+              <a:buNone/>
+            </a:pPr>
+            <a:r>
+              <a:rPr lang="en-US" sz="1600" dirty="0">
+                <a:solidFill>
+                  <a:srgbClr val="2EC4B6"/>
+                </a:solidFill>
+                <a:latin typeface="Calibri" pitchFamily="34" charset="0"/>
+                <a:ea typeface="Calibri" pitchFamily="34" charset="-122"/>
+                <a:cs typeface="Calibri" pitchFamily="34" charset="-120"/>
+              </a:rPr>
+              <a:t>Hold the failing vault, or move the stock?</a:t>
+            </a:r>
+            <a:endParaRPr lang="en-US" sz="1600" dirty="0"/>
+          </a:p>
+        </p:txBody>
       </p:sp>
       <p:sp>
         <p:nvSpPr>
@@ -4166,34 +4185,34 @@
         </p:nvSpPr>
         <p:spPr>
           <a:xfrm>
-            <a:off x="777240" y="1417320"/>
-            <a:ext cx="384048" cy="384048"/>
-          </a:xfrm>
-          <a:prstGeom prst="rect">
-            <a:avLst/>
-          </a:prstGeom>
-          <a:noFill/>
-          <a:ln/>
-        </p:spPr>
-        <p:txBody>
-          <a:bodyPr wrap="square" lIns="0" tIns="0" rIns="0" bIns="0" rtlCol="0" anchor="ctr"/>
-          <a:lstStyle/>
-          <a:p>
-            <a:pPr algn="ctr" indent="0" marL="0">
-              <a:buNone/>
-            </a:pPr>
-            <a:r>
-              <a:rPr lang="en-US" sz="1200" b="1" dirty="0">
-                <a:solidFill>
-                  <a:srgbClr val="04151C"/>
-                </a:solidFill>
-                <a:latin typeface="Calibri" pitchFamily="34" charset="0"/>
-                <a:ea typeface="Calibri" pitchFamily="34" charset="-122"/>
-                <a:cs typeface="Calibri" pitchFamily="34" charset="-120"/>
-              </a:rPr>
-              <a:t>1</a:t>
-            </a:r>
-            <a:endParaRPr lang="en-US" sz="1200" dirty="0"/>
+            <a:off x="822960" y="1920240"/>
+            <a:ext cx="2194560" cy="822960"/>
+          </a:xfrm>
+          <a:prstGeom prst="rect">
+            <a:avLst/>
+          </a:prstGeom>
+          <a:noFill/>
+          <a:ln/>
+        </p:spPr>
+        <p:txBody>
+          <a:bodyPr wrap="square" lIns="0" tIns="0" rIns="0" bIns="0" rtlCol="0" anchor="ctr"/>
+          <a:lstStyle/>
+          <a:p>
+            <a:pPr indent="0" marL="0">
+              <a:buNone/>
+            </a:pPr>
+            <a:r>
+              <a:rPr lang="en-US" sz="5400" b="1" dirty="0">
+                <a:solidFill>
+                  <a:srgbClr val="E07A3D"/>
+                </a:solidFill>
+                <a:latin typeface="Calibri" pitchFamily="34" charset="0"/>
+                <a:ea typeface="Calibri" pitchFamily="34" charset="-122"/>
+                <a:cs typeface="Calibri" pitchFamily="34" charset="-120"/>
+              </a:rPr>
+              <a:t>0.468</a:t>
+            </a:r>
+            <a:endParaRPr lang="en-US" sz="5400" dirty="0"/>
           </a:p>
         </p:txBody>
       </p:sp>
@@ -4205,24 +4224,80 @@
         </p:nvSpPr>
         <p:spPr>
           <a:xfrm>
-            <a:off x="1280160" y="1435608"/>
-            <a:ext cx="2560320" cy="365760"/>
-          </a:xfrm>
-          <a:prstGeom prst="rect">
-            <a:avLst/>
-          </a:prstGeom>
-          <a:noFill/>
-          <a:ln/>
-        </p:spPr>
-        <p:txBody>
-          <a:bodyPr wrap="square" lIns="0" tIns="0" rIns="0" bIns="0" rtlCol="0" anchor="ctr"/>
-          <a:lstStyle/>
-          <a:p>
-            <a:pPr indent="0" marL="0">
-              <a:buNone/>
-            </a:pPr>
-            <a:r>
-              <a:rPr lang="en-US" sz="1400" dirty="0">
+            <a:off x="822960" y="2788920"/>
+            <a:ext cx="2194560" cy="731520"/>
+          </a:xfrm>
+          <a:prstGeom prst="rect">
+            <a:avLst/>
+          </a:prstGeom>
+          <a:noFill/>
+          <a:ln/>
+        </p:spPr>
+        <p:txBody>
+          <a:bodyPr wrap="square" lIns="0" tIns="0" rIns="0" bIns="0" rtlCol="0" anchor="ctr"/>
+          <a:lstStyle/>
+          <a:p>
+            <a:pPr indent="0" marL="0">
+              <a:buNone/>
+            </a:pPr>
+            <a:r>
+              <a:rPr lang="en-US" sz="1300" dirty="0">
+                <a:solidFill>
+                  <a:srgbClr val="7FA3AD"/>
+                </a:solidFill>
+                <a:latin typeface="Calibri" pitchFamily="34" charset="0"/>
+                <a:ea typeface="Calibri" pitchFamily="34" charset="-122"/>
+                <a:cs typeface="Calibri" pitchFamily="34" charset="-120"/>
+              </a:rPr>
+              <a:t>kWh to hold a degraded</a:t>
+            </a:r>
+            <a:endParaRPr lang="en-US" sz="1300" dirty="0"/>
+          </a:p>
+          <a:p>
+            <a:pPr indent="0" marL="0">
+              <a:buNone/>
+            </a:pPr>
+            <a:r>
+              <a:rPr lang="en-US" sz="1300" dirty="0">
+                <a:solidFill>
+                  <a:srgbClr val="7FA3AD"/>
+                </a:solidFill>
+                <a:latin typeface="Calibri" pitchFamily="34" charset="0"/>
+                <a:ea typeface="Calibri" pitchFamily="34" charset="-122"/>
+                <a:cs typeface="Calibri" pitchFamily="34" charset="-120"/>
+              </a:rPr>
+              <a:t>compressor for 30 min</a:t>
+            </a:r>
+            <a:endParaRPr lang="en-US" sz="1300" dirty="0"/>
+          </a:p>
+        </p:txBody>
+      </p:sp>
+      <p:sp>
+        <p:nvSpPr>
+          <p:cNvPr id="8" name="Text 6"/>
+          <p:cNvSpPr/>
+          <p:nvPr/>
+        </p:nvSpPr>
+        <p:spPr>
+          <a:xfrm>
+            <a:off x="3383280" y="1920240"/>
+            <a:ext cx="2194560" cy="822960"/>
+          </a:xfrm>
+          <a:prstGeom prst="rect">
+            <a:avLst/>
+          </a:prstGeom>
+          <a:noFill/>
+          <a:ln/>
+        </p:spPr>
+        <p:txBody>
+          <a:bodyPr wrap="square" lIns="0" tIns="0" rIns="0" bIns="0" rtlCol="0" anchor="ctr"/>
+          <a:lstStyle/>
+          <a:p>
+            <a:pPr indent="0" marL="0">
+              <a:buNone/>
+            </a:pPr>
+            <a:r>
+              <a:rPr lang="en-US" sz="5400" b="1" dirty="0">
                 <a:solidFill>
                   <a:srgbClr val="2EC4B6"/>
                 </a:solidFill>
@@ -4230,38 +4305,94 @@
                 <a:ea typeface="Calibri" pitchFamily="34" charset="-122"/>
                 <a:cs typeface="Calibri" pitchFamily="34" charset="-120"/>
               </a:rPr>
-              <a:t>0–10s</a:t>
-            </a:r>
-            <a:endParaRPr lang="en-US" sz="1400" dirty="0"/>
-          </a:p>
-        </p:txBody>
-      </p:sp>
-      <p:sp>
-        <p:nvSpPr>
-          <p:cNvPr id="8" name="Text 6"/>
-          <p:cNvSpPr/>
-          <p:nvPr/>
-        </p:nvSpPr>
-        <p:spPr>
-          <a:xfrm>
-            <a:off x="777240" y="2057400"/>
-            <a:ext cx="3154680" cy="1005840"/>
-          </a:xfrm>
-          <a:prstGeom prst="rect">
-            <a:avLst/>
-          </a:prstGeom>
-          <a:noFill/>
-          <a:ln/>
-        </p:spPr>
-        <p:txBody>
-          <a:bodyPr wrap="square" lIns="0" tIns="0" rIns="0" bIns="0" rtlCol="0" anchor="ctr"/>
-          <a:lstStyle/>
-          <a:p>
-            <a:pPr indent="0" marL="0">
-              <a:buNone/>
-            </a:pPr>
-            <a:r>
-              <a:rPr lang="en-US" sz="1600" dirty="0">
+              <a:t>0.220</a:t>
+            </a:r>
+            <a:endParaRPr lang="en-US" sz="5400" dirty="0"/>
+          </a:p>
+        </p:txBody>
+      </p:sp>
+      <p:sp>
+        <p:nvSpPr>
+          <p:cNvPr id="9" name="Text 7"/>
+          <p:cNvSpPr/>
+          <p:nvPr/>
+        </p:nvSpPr>
+        <p:spPr>
+          <a:xfrm>
+            <a:off x="3383280" y="2788920"/>
+            <a:ext cx="2194560" cy="731520"/>
+          </a:xfrm>
+          <a:prstGeom prst="rect">
+            <a:avLst/>
+          </a:prstGeom>
+          <a:noFill/>
+          <a:ln/>
+        </p:spPr>
+        <p:txBody>
+          <a:bodyPr wrap="square" lIns="0" tIns="0" rIns="0" bIns="0" rtlCol="0" anchor="ctr"/>
+          <a:lstStyle/>
+          <a:p>
+            <a:pPr indent="0" marL="0">
+              <a:buNone/>
+            </a:pPr>
+            <a:r>
+              <a:rPr lang="en-US" sz="1300" dirty="0">
+                <a:solidFill>
+                  <a:srgbClr val="7FA3AD"/>
+                </a:solidFill>
+                <a:latin typeface="Calibri" pitchFamily="34" charset="0"/>
+                <a:ea typeface="Calibri" pitchFamily="34" charset="-122"/>
+                <a:cs typeface="Calibri" pitchFamily="34" charset="-120"/>
+              </a:rPr>
+              <a:t>kWh to relocate the</a:t>
+            </a:r>
+            <a:endParaRPr lang="en-US" sz="1300" dirty="0"/>
+          </a:p>
+          <a:p>
+            <a:pPr indent="0" marL="0">
+              <a:buNone/>
+            </a:pPr>
+            <a:r>
+              <a:rPr lang="en-US" sz="1300" dirty="0">
+                <a:solidFill>
+                  <a:srgbClr val="7FA3AD"/>
+                </a:solidFill>
+                <a:latin typeface="Calibri" pitchFamily="34" charset="0"/>
+                <a:ea typeface="Calibri" pitchFamily="34" charset="-122"/>
+                <a:cs typeface="Calibri" pitchFamily="34" charset="-120"/>
+              </a:rPr>
+              <a:t>stock and let it cool</a:t>
+            </a:r>
+            <a:endParaRPr lang="en-US" sz="1300" dirty="0"/>
+          </a:p>
+        </p:txBody>
+      </p:sp>
+      <p:sp>
+        <p:nvSpPr>
+          <p:cNvPr id="10" name="Text 8"/>
+          <p:cNvSpPr/>
+          <p:nvPr/>
+        </p:nvSpPr>
+        <p:spPr>
+          <a:xfrm>
+            <a:off x="822960" y="3749040"/>
+            <a:ext cx="4937760" cy="1920240"/>
+          </a:xfrm>
+          <a:prstGeom prst="rect">
+            <a:avLst/>
+          </a:prstGeom>
+          <a:noFill/>
+          <a:ln/>
+        </p:spPr>
+        <p:txBody>
+          <a:bodyPr wrap="square" lIns="0" tIns="0" rIns="0" bIns="0" rtlCol="0" anchor="ctr"/>
+          <a:lstStyle/>
+          <a:p>
+            <a:pPr indent="0" marL="0">
+              <a:buNone/>
+            </a:pPr>
+            <a:r>
+              <a:rPr lang="en-US" sz="1500" dirty="0">
                 <a:solidFill>
                   <a:srgbClr val="E8F1F2"/>
                 </a:solidFill>
@@ -4269,103 +4400,207 @@
                 <a:ea typeface="Calibri" pitchFamily="34" charset="-122"/>
                 <a:cs typeface="Calibri" pitchFamily="34" charset="-120"/>
               </a:rPr>
-              <a:t>Plant, not a chart</a:t>
-            </a:r>
-            <a:endParaRPr lang="en-US" sz="1600" dirty="0"/>
-          </a:p>
-        </p:txBody>
-      </p:sp>
-      <p:sp>
-        <p:nvSpPr>
-          <p:cNvPr id="9" name="Shape 7"/>
-          <p:cNvSpPr/>
-          <p:nvPr/>
-        </p:nvSpPr>
-        <p:spPr>
-          <a:xfrm>
-            <a:off x="4343400" y="1143000"/>
-            <a:ext cx="3611880" cy="2240280"/>
+              <a:t>The router also refuses a backup that could not absorb a second failure. Vault 3 had room for one vault, not two — so the next failure cascaded to ICU satellite 2 before anyone asked.</a:t>
+            </a:r>
+            <a:endParaRPr lang="en-US" sz="1500" dirty="0"/>
+          </a:p>
+        </p:txBody>
+      </p:sp>
+      <p:sp>
+        <p:nvSpPr>
+          <p:cNvPr id="11" name="Shape 9"/>
+          <p:cNvSpPr/>
+          <p:nvPr/>
+        </p:nvSpPr>
+        <p:spPr>
+          <a:xfrm>
+            <a:off x="6309360" y="1143000"/>
+            <a:ext cx="5303520" cy="4937760"/>
           </a:xfrm>
           <a:prstGeom prst="roundRect">
             <a:avLst>
-              <a:gd name="adj" fmla="val 4082"/>
+              <a:gd name="adj" fmla="val 2222"/>
             </a:avLst>
           </a:prstGeom>
           <a:solidFill>
-            <a:srgbClr val="0B2430"/>
+            <a:srgbClr val="04151C"/>
           </a:solidFill>
           <a:ln/>
         </p:spPr>
       </p:sp>
       <p:sp>
         <p:nvSpPr>
-          <p:cNvPr id="10" name="Shape 8"/>
-          <p:cNvSpPr/>
-          <p:nvPr/>
-        </p:nvSpPr>
-        <p:spPr>
-          <a:xfrm>
-            <a:off x="4572000" y="1417320"/>
-            <a:ext cx="384048" cy="384048"/>
-          </a:xfrm>
-          <a:prstGeom prst="ellipse">
-            <a:avLst/>
-          </a:prstGeom>
-          <a:solidFill>
-            <a:srgbClr val="2EC4B6"/>
-          </a:solidFill>
-          <a:ln/>
-        </p:spPr>
-      </p:sp>
-      <p:sp>
-        <p:nvSpPr>
-          <p:cNvPr id="11" name="Text 9"/>
-          <p:cNvSpPr/>
-          <p:nvPr/>
-        </p:nvSpPr>
-        <p:spPr>
-          <a:xfrm>
-            <a:off x="4572000" y="1417320"/>
-            <a:ext cx="384048" cy="384048"/>
-          </a:xfrm>
-          <a:prstGeom prst="rect">
-            <a:avLst/>
-          </a:prstGeom>
-          <a:noFill/>
-          <a:ln/>
-        </p:spPr>
-        <p:txBody>
-          <a:bodyPr wrap="square" lIns="0" tIns="0" rIns="0" bIns="0" rtlCol="0" anchor="ctr"/>
-          <a:lstStyle/>
-          <a:p>
-            <a:pPr algn="ctr" indent="0" marL="0">
-              <a:buNone/>
-            </a:pPr>
-            <a:r>
-              <a:rPr lang="en-US" sz="1200" b="1" dirty="0">
-                <a:solidFill>
-                  <a:srgbClr val="04151C"/>
-                </a:solidFill>
-                <a:latin typeface="Calibri" pitchFamily="34" charset="0"/>
-                <a:ea typeface="Calibri" pitchFamily="34" charset="-122"/>
-                <a:cs typeface="Calibri" pitchFamily="34" charset="-120"/>
-              </a:rPr>
-              <a:t>2</a:t>
-            </a:r>
-            <a:endParaRPr lang="en-US" sz="1200" dirty="0"/>
-          </a:p>
-        </p:txBody>
-      </p:sp>
-      <p:sp>
-        <p:nvSpPr>
           <p:cNvPr id="12" name="Text 10"/>
           <p:cNvSpPr/>
           <p:nvPr/>
         </p:nvSpPr>
         <p:spPr>
           <a:xfrm>
-            <a:off x="5074920" y="1435608"/>
-            <a:ext cx="2560320" cy="365760"/>
+            <a:off x="6583680" y="1371600"/>
+            <a:ext cx="4754880" cy="365760"/>
+          </a:xfrm>
+          <a:prstGeom prst="rect">
+            <a:avLst/>
+          </a:prstGeom>
+          <a:noFill/>
+          <a:ln/>
+        </p:spPr>
+        <p:txBody>
+          <a:bodyPr wrap="square" lIns="0" tIns="0" rIns="0" bIns="0" rtlCol="0" anchor="ctr"/>
+          <a:lstStyle/>
+          <a:p>
+            <a:pPr indent="0" marL="0">
+              <a:buNone/>
+            </a:pPr>
+            <a:r>
+              <a:rPr lang="en-US" sz="1600" dirty="0">
+                <a:solidFill>
+                  <a:srgbClr val="2EC4B6"/>
+                </a:solidFill>
+                <a:latin typeface="Calibri" pitchFamily="34" charset="0"/>
+                <a:ea typeface="Calibri" pitchFamily="34" charset="-122"/>
+                <a:cs typeface="Calibri" pitchFamily="34" charset="-120"/>
+              </a:rPr>
+              <a:t>Chain of Cold Custody</a:t>
+            </a:r>
+            <a:endParaRPr lang="en-US" sz="1600" dirty="0"/>
+          </a:p>
+        </p:txBody>
+      </p:sp>
+      <p:sp>
+        <p:nvSpPr>
+          <p:cNvPr id="13" name="Text 11"/>
+          <p:cNvSpPr/>
+          <p:nvPr/>
+        </p:nvSpPr>
+        <p:spPr>
+          <a:xfrm>
+            <a:off x="6583680" y="1920240"/>
+            <a:ext cx="4754880" cy="2743200"/>
+          </a:xfrm>
+          <a:prstGeom prst="rect">
+            <a:avLst/>
+          </a:prstGeom>
+          <a:noFill/>
+          <a:ln/>
+        </p:spPr>
+        <p:txBody>
+          <a:bodyPr wrap="square" lIns="0" tIns="0" rIns="0" bIns="0" rtlCol="0" anchor="ctr"/>
+          <a:lstStyle/>
+          <a:p>
+            <a:pPr indent="0" marL="0">
+              <a:buNone/>
+            </a:pPr>
+            <a:r>
+              <a:rPr lang="en-US" sz="1600" dirty="0">
+                <a:solidFill>
+                  <a:srgbClr val="E8F1F2"/>
+                </a:solidFill>
+                <a:latin typeface="Calibri" pitchFamily="34" charset="0"/>
+                <a:ea typeface="Calibri" pitchFamily="34" charset="-122"/>
+                <a:cs typeface="Calibri" pitchFamily="34" charset="-120"/>
+              </a:rPr>
+              <a:t>Every handoff, timestamped IST</a:t>
+            </a:r>
+            <a:endParaRPr lang="en-US" sz="1600" dirty="0"/>
+          </a:p>
+          <a:p>
+            <a:pPr indent="0" marL="0">
+              <a:buNone/>
+            </a:pPr>
+            <a:r>
+              <a:rPr lang="en-US" sz="1600" dirty="0">
+                <a:solidFill>
+                  <a:srgbClr val="E8F1F2"/>
+                </a:solidFill>
+                <a:latin typeface="Calibri" pitchFamily="34" charset="0"/>
+                <a:ea typeface="Calibri" pitchFamily="34" charset="-122"/>
+                <a:cs typeface="Calibri" pitchFamily="34" charset="-120"/>
+              </a:rPr>
+              <a:t>Min / max / time out of range</a:t>
+            </a:r>
+            <a:endParaRPr lang="en-US" sz="1600" dirty="0"/>
+          </a:p>
+          <a:p>
+            <a:pPr indent="0" marL="0">
+              <a:buNone/>
+            </a:pPr>
+            <a:r>
+              <a:rPr lang="en-US" sz="1600" dirty="0">
+                <a:solidFill>
+                  <a:srgbClr val="E8F1F2"/>
+                </a:solidFill>
+                <a:latin typeface="Calibri" pitchFamily="34" charset="0"/>
+                <a:ea typeface="Calibri" pitchFamily="34" charset="-122"/>
+                <a:cs typeface="Calibri" pitchFamily="34" charset="-120"/>
+              </a:rPr>
+              <a:t>Sensor ID + last calibration</a:t>
+            </a:r>
+            <a:endParaRPr lang="en-US" sz="1600" dirty="0"/>
+          </a:p>
+          <a:p>
+            <a:pPr indent="0" marL="0">
+              <a:buNone/>
+            </a:pPr>
+            <a:r>
+              <a:rPr lang="en-US" sz="1600" dirty="0">
+                <a:solidFill>
+                  <a:srgbClr val="E8F1F2"/>
+                </a:solidFill>
+                <a:latin typeface="Calibri" pitchFamily="34" charset="0"/>
+                <a:ea typeface="Calibri" pitchFamily="34" charset="-122"/>
+                <a:cs typeface="Calibri" pitchFamily="34" charset="-120"/>
+              </a:rPr>
+              <a:t>Disposition: released or quarantined</a:t>
+            </a:r>
+            <a:endParaRPr lang="en-US" sz="1600" dirty="0"/>
+          </a:p>
+          <a:p>
+            <a:pPr indent="0" marL="0">
+              <a:buNone/>
+            </a:pPr>
+            <a:r>
+              <a:rPr lang="en-US" sz="1600" dirty="0">
+                <a:solidFill>
+                  <a:srgbClr val="E8F1F2"/>
+                </a:solidFill>
+                <a:latin typeface="Calibri" pitchFamily="34" charset="0"/>
+                <a:ea typeface="Calibri" pitchFamily="34" charset="-122"/>
+                <a:cs typeface="Calibri" pitchFamily="34" charset="-120"/>
+              </a:rPr>
+              <a:t>Computer-generated audit trail</a:t>
+            </a:r>
+            <a:endParaRPr lang="en-US" sz="1600" dirty="0"/>
+          </a:p>
+          <a:p>
+            <a:pPr indent="0" marL="0">
+              <a:buNone/>
+            </a:pPr>
+            <a:r>
+              <a:rPr lang="en-US" sz="1600" dirty="0">
+                <a:solidFill>
+                  <a:srgbClr val="E8F1F2"/>
+                </a:solidFill>
+                <a:latin typeface="Calibri" pitchFamily="34" charset="0"/>
+                <a:ea typeface="Calibri" pitchFamily="34" charset="-122"/>
+                <a:cs typeface="Calibri" pitchFamily="34" charset="-120"/>
+              </a:rPr>
+              <a:t>Payload hash on every document</a:t>
+            </a:r>
+            <a:endParaRPr lang="en-US" sz="1600" dirty="0"/>
+          </a:p>
+        </p:txBody>
+      </p:sp>
+      <p:sp>
+        <p:nvSpPr>
+          <p:cNvPr id="14" name="Text 12"/>
+          <p:cNvSpPr/>
+          <p:nvPr/>
+        </p:nvSpPr>
+        <p:spPr>
+          <a:xfrm>
+            <a:off x="6583680" y="4846320"/>
+            <a:ext cx="4754880" cy="914400"/>
           </a:xfrm>
           <a:prstGeom prst="rect">
             <a:avLst/>
@@ -4383,690 +4618,15 @@
             <a:r>
               <a:rPr lang="en-US" sz="1400" dirty="0">
                 <a:solidFill>
-                  <a:srgbClr val="2EC4B6"/>
-                </a:solidFill>
-                <a:latin typeface="Calibri" pitchFamily="34" charset="0"/>
-                <a:ea typeface="Calibri" pitchFamily="34" charset="-122"/>
-                <a:cs typeface="Calibri" pitchFamily="34" charset="-120"/>
-              </a:rPr>
-              <a:t>10–25s</a:t>
+                  <a:srgbClr val="7FA3AD"/>
+                </a:solidFill>
+                <a:latin typeface="Calibri" pitchFamily="34" charset="0"/>
+                <a:ea typeface="Calibri" pitchFamily="34" charset="-122"/>
+                <a:cs typeface="Calibri" pitchFamily="34" charset="-120"/>
+              </a:rPr>
+              <a:t>We moved before any excursion, so this batch reads RELEASED — and the document proves it.</a:t>
             </a:r>
             <a:endParaRPr lang="en-US" sz="1400" dirty="0"/>
-          </a:p>
-        </p:txBody>
-      </p:sp>
-      <p:sp>
-        <p:nvSpPr>
-          <p:cNvPr id="13" name="Text 11"/>
-          <p:cNvSpPr/>
-          <p:nvPr/>
-        </p:nvSpPr>
-        <p:spPr>
-          <a:xfrm>
-            <a:off x="4572000" y="2057400"/>
-            <a:ext cx="3154680" cy="1005840"/>
-          </a:xfrm>
-          <a:prstGeom prst="rect">
-            <a:avLst/>
-          </a:prstGeom>
-          <a:noFill/>
-          <a:ln/>
-        </p:spPr>
-        <p:txBody>
-          <a:bodyPr wrap="square" lIns="0" tIns="0" rIns="0" bIns="0" rtlCol="0" anchor="ctr"/>
-          <a:lstStyle/>
-          <a:p>
-            <a:pPr indent="0" marL="0">
-              <a:buNone/>
-            </a:pPr>
-            <a:r>
-              <a:rPr lang="en-US" sz="1600" dirty="0">
-                <a:solidFill>
-                  <a:srgbClr val="E8F1F2"/>
-                </a:solidFill>
-                <a:latin typeface="Calibri" pitchFamily="34" charset="0"/>
-                <a:ea typeface="Calibri" pitchFamily="34" charset="-122"/>
-                <a:cs typeface="Calibri" pitchFamily="34" charset="-120"/>
-              </a:rPr>
-              <a:t>Kill probe → ticket, no MOVE</a:t>
-            </a:r>
-            <a:endParaRPr lang="en-US" sz="1600" dirty="0"/>
-          </a:p>
-        </p:txBody>
-      </p:sp>
-      <p:sp>
-        <p:nvSpPr>
-          <p:cNvPr id="14" name="Shape 12"/>
-          <p:cNvSpPr/>
-          <p:nvPr/>
-        </p:nvSpPr>
-        <p:spPr>
-          <a:xfrm>
-            <a:off x="8138160" y="1143000"/>
-            <a:ext cx="3611880" cy="2240280"/>
-          </a:xfrm>
-          <a:prstGeom prst="roundRect">
-            <a:avLst>
-              <a:gd name="adj" fmla="val 4082"/>
-            </a:avLst>
-          </a:prstGeom>
-          <a:solidFill>
-            <a:srgbClr val="0B2430"/>
-          </a:solidFill>
-          <a:ln/>
-        </p:spPr>
-      </p:sp>
-      <p:sp>
-        <p:nvSpPr>
-          <p:cNvPr id="15" name="Shape 13"/>
-          <p:cNvSpPr/>
-          <p:nvPr/>
-        </p:nvSpPr>
-        <p:spPr>
-          <a:xfrm>
-            <a:off x="8366760" y="1417320"/>
-            <a:ext cx="384048" cy="384048"/>
-          </a:xfrm>
-          <a:prstGeom prst="ellipse">
-            <a:avLst/>
-          </a:prstGeom>
-          <a:solidFill>
-            <a:srgbClr val="2EC4B6"/>
-          </a:solidFill>
-          <a:ln/>
-        </p:spPr>
-      </p:sp>
-      <p:sp>
-        <p:nvSpPr>
-          <p:cNvPr id="16" name="Text 14"/>
-          <p:cNvSpPr/>
-          <p:nvPr/>
-        </p:nvSpPr>
-        <p:spPr>
-          <a:xfrm>
-            <a:off x="8366760" y="1417320"/>
-            <a:ext cx="384048" cy="384048"/>
-          </a:xfrm>
-          <a:prstGeom prst="rect">
-            <a:avLst/>
-          </a:prstGeom>
-          <a:noFill/>
-          <a:ln/>
-        </p:spPr>
-        <p:txBody>
-          <a:bodyPr wrap="square" lIns="0" tIns="0" rIns="0" bIns="0" rtlCol="0" anchor="ctr"/>
-          <a:lstStyle/>
-          <a:p>
-            <a:pPr algn="ctr" indent="0" marL="0">
-              <a:buNone/>
-            </a:pPr>
-            <a:r>
-              <a:rPr lang="en-US" sz="1200" b="1" dirty="0">
-                <a:solidFill>
-                  <a:srgbClr val="04151C"/>
-                </a:solidFill>
-                <a:latin typeface="Calibri" pitchFamily="34" charset="0"/>
-                <a:ea typeface="Calibri" pitchFamily="34" charset="-122"/>
-                <a:cs typeface="Calibri" pitchFamily="34" charset="-120"/>
-              </a:rPr>
-              <a:t>3</a:t>
-            </a:r>
-            <a:endParaRPr lang="en-US" sz="1200" dirty="0"/>
-          </a:p>
-        </p:txBody>
-      </p:sp>
-      <p:sp>
-        <p:nvSpPr>
-          <p:cNvPr id="17" name="Text 15"/>
-          <p:cNvSpPr/>
-          <p:nvPr/>
-        </p:nvSpPr>
-        <p:spPr>
-          <a:xfrm>
-            <a:off x="8869680" y="1435608"/>
-            <a:ext cx="2560320" cy="365760"/>
-          </a:xfrm>
-          <a:prstGeom prst="rect">
-            <a:avLst/>
-          </a:prstGeom>
-          <a:noFill/>
-          <a:ln/>
-        </p:spPr>
-        <p:txBody>
-          <a:bodyPr wrap="square" lIns="0" tIns="0" rIns="0" bIns="0" rtlCol="0" anchor="ctr"/>
-          <a:lstStyle/>
-          <a:p>
-            <a:pPr indent="0" marL="0">
-              <a:buNone/>
-            </a:pPr>
-            <a:r>
-              <a:rPr lang="en-US" sz="1400" dirty="0">
-                <a:solidFill>
-                  <a:srgbClr val="2EC4B6"/>
-                </a:solidFill>
-                <a:latin typeface="Calibri" pitchFamily="34" charset="0"/>
-                <a:ea typeface="Calibri" pitchFamily="34" charset="-122"/>
-                <a:cs typeface="Calibri" pitchFamily="34" charset="-120"/>
-              </a:rPr>
-              <a:t>25–40s</a:t>
-            </a:r>
-            <a:endParaRPr lang="en-US" sz="1400" dirty="0"/>
-          </a:p>
-        </p:txBody>
-      </p:sp>
-      <p:sp>
-        <p:nvSpPr>
-          <p:cNvPr id="18" name="Text 16"/>
-          <p:cNvSpPr/>
-          <p:nvPr/>
-        </p:nvSpPr>
-        <p:spPr>
-          <a:xfrm>
-            <a:off x="8366760" y="2057400"/>
-            <a:ext cx="3154680" cy="1005840"/>
-          </a:xfrm>
-          <a:prstGeom prst="rect">
-            <a:avLst/>
-          </a:prstGeom>
-          <a:noFill/>
-          <a:ln/>
-        </p:spPr>
-        <p:txBody>
-          <a:bodyPr wrap="square" lIns="0" tIns="0" rIns="0" bIns="0" rtlCol="0" anchor="ctr"/>
-          <a:lstStyle/>
-          <a:p>
-            <a:pPr indent="0" marL="0">
-              <a:buNone/>
-            </a:pPr>
-            <a:r>
-              <a:rPr lang="en-US" sz="1600" dirty="0">
-                <a:solidFill>
-                  <a:srgbClr val="E8F1F2"/>
-                </a:solidFill>
-                <a:latin typeface="Calibri" pitchFamily="34" charset="0"/>
-                <a:ea typeface="Calibri" pitchFamily="34" charset="-122"/>
-                <a:cs typeface="Calibri" pitchFamily="34" charset="-120"/>
-              </a:rPr>
-              <a:t>Compressor: T_eq up, air still legal</a:t>
-            </a:r>
-            <a:endParaRPr lang="en-US" sz="1600" dirty="0"/>
-          </a:p>
-        </p:txBody>
-      </p:sp>
-      <p:sp>
-        <p:nvSpPr>
-          <p:cNvPr id="19" name="Shape 17"/>
-          <p:cNvSpPr/>
-          <p:nvPr/>
-        </p:nvSpPr>
-        <p:spPr>
-          <a:xfrm>
-            <a:off x="548640" y="3611880"/>
-            <a:ext cx="3611880" cy="2240280"/>
-          </a:xfrm>
-          <a:prstGeom prst="roundRect">
-            <a:avLst>
-              <a:gd name="adj" fmla="val 4082"/>
-            </a:avLst>
-          </a:prstGeom>
-          <a:solidFill>
-            <a:srgbClr val="0B2430"/>
-          </a:solidFill>
-          <a:ln/>
-        </p:spPr>
-      </p:sp>
-      <p:sp>
-        <p:nvSpPr>
-          <p:cNvPr id="20" name="Shape 18"/>
-          <p:cNvSpPr/>
-          <p:nvPr/>
-        </p:nvSpPr>
-        <p:spPr>
-          <a:xfrm>
-            <a:off x="777240" y="3886200"/>
-            <a:ext cx="384048" cy="384048"/>
-          </a:xfrm>
-          <a:prstGeom prst="ellipse">
-            <a:avLst/>
-          </a:prstGeom>
-          <a:solidFill>
-            <a:srgbClr val="2EC4B6"/>
-          </a:solidFill>
-          <a:ln/>
-        </p:spPr>
-      </p:sp>
-      <p:sp>
-        <p:nvSpPr>
-          <p:cNvPr id="21" name="Text 19"/>
-          <p:cNvSpPr/>
-          <p:nvPr/>
-        </p:nvSpPr>
-        <p:spPr>
-          <a:xfrm>
-            <a:off x="777240" y="3886200"/>
-            <a:ext cx="384048" cy="384048"/>
-          </a:xfrm>
-          <a:prstGeom prst="rect">
-            <a:avLst/>
-          </a:prstGeom>
-          <a:noFill/>
-          <a:ln/>
-        </p:spPr>
-        <p:txBody>
-          <a:bodyPr wrap="square" lIns="0" tIns="0" rIns="0" bIns="0" rtlCol="0" anchor="ctr"/>
-          <a:lstStyle/>
-          <a:p>
-            <a:pPr algn="ctr" indent="0" marL="0">
-              <a:buNone/>
-            </a:pPr>
-            <a:r>
-              <a:rPr lang="en-US" sz="1200" b="1" dirty="0">
-                <a:solidFill>
-                  <a:srgbClr val="04151C"/>
-                </a:solidFill>
-                <a:latin typeface="Calibri" pitchFamily="34" charset="0"/>
-                <a:ea typeface="Calibri" pitchFamily="34" charset="-122"/>
-                <a:cs typeface="Calibri" pitchFamily="34" charset="-120"/>
-              </a:rPr>
-              <a:t>4</a:t>
-            </a:r>
-            <a:endParaRPr lang="en-US" sz="1200" dirty="0"/>
-          </a:p>
-        </p:txBody>
-      </p:sp>
-      <p:sp>
-        <p:nvSpPr>
-          <p:cNvPr id="22" name="Text 20"/>
-          <p:cNvSpPr/>
-          <p:nvPr/>
-        </p:nvSpPr>
-        <p:spPr>
-          <a:xfrm>
-            <a:off x="1280160" y="3904488"/>
-            <a:ext cx="2560320" cy="365760"/>
-          </a:xfrm>
-          <a:prstGeom prst="rect">
-            <a:avLst/>
-          </a:prstGeom>
-          <a:noFill/>
-          <a:ln/>
-        </p:spPr>
-        <p:txBody>
-          <a:bodyPr wrap="square" lIns="0" tIns="0" rIns="0" bIns="0" rtlCol="0" anchor="ctr"/>
-          <a:lstStyle/>
-          <a:p>
-            <a:pPr indent="0" marL="0">
-              <a:buNone/>
-            </a:pPr>
-            <a:r>
-              <a:rPr lang="en-US" sz="1400" dirty="0">
-                <a:solidFill>
-                  <a:srgbClr val="2EC4B6"/>
-                </a:solidFill>
-                <a:latin typeface="Calibri" pitchFamily="34" charset="0"/>
-                <a:ea typeface="Calibri" pitchFamily="34" charset="-122"/>
-                <a:cs typeface="Calibri" pitchFamily="34" charset="-120"/>
-              </a:rPr>
-              <a:t>40–65s</a:t>
-            </a:r>
-            <a:endParaRPr lang="en-US" sz="1400" dirty="0"/>
-          </a:p>
-        </p:txBody>
-      </p:sp>
-      <p:sp>
-        <p:nvSpPr>
-          <p:cNvPr id="23" name="Text 21"/>
-          <p:cNvSpPr/>
-          <p:nvPr/>
-        </p:nvSpPr>
-        <p:spPr>
-          <a:xfrm>
-            <a:off x="777240" y="4526280"/>
-            <a:ext cx="3154680" cy="1005840"/>
-          </a:xfrm>
-          <a:prstGeom prst="rect">
-            <a:avLst/>
-          </a:prstGeom>
-          <a:noFill/>
-          <a:ln/>
-        </p:spPr>
-        <p:txBody>
-          <a:bodyPr wrap="square" lIns="0" tIns="0" rIns="0" bIns="0" rtlCol="0" anchor="ctr"/>
-          <a:lstStyle/>
-          <a:p>
-            <a:pPr indent="0" marL="0">
-              <a:buNone/>
-            </a:pPr>
-            <a:r>
-              <a:rPr lang="en-US" sz="1600" dirty="0">
-                <a:solidFill>
-                  <a:srgbClr val="E8F1F2"/>
-                </a:solidFill>
-                <a:latin typeface="Calibri" pitchFamily="34" charset="0"/>
-                <a:ea typeface="Calibri" pitchFamily="34" charset="-122"/>
-                <a:cs typeface="Calibri" pitchFamily="34" charset="-120"/>
-              </a:rPr>
-              <a:t>Accept. Wrong-vault QR fails.</a:t>
-            </a:r>
-            <a:endParaRPr lang="en-US" sz="1600" dirty="0"/>
-          </a:p>
-        </p:txBody>
-      </p:sp>
-      <p:sp>
-        <p:nvSpPr>
-          <p:cNvPr id="24" name="Shape 22"/>
-          <p:cNvSpPr/>
-          <p:nvPr/>
-        </p:nvSpPr>
-        <p:spPr>
-          <a:xfrm>
-            <a:off x="4343400" y="3611880"/>
-            <a:ext cx="3611880" cy="2240280"/>
-          </a:xfrm>
-          <a:prstGeom prst="roundRect">
-            <a:avLst>
-              <a:gd name="adj" fmla="val 4082"/>
-            </a:avLst>
-          </a:prstGeom>
-          <a:solidFill>
-            <a:srgbClr val="0B2430"/>
-          </a:solidFill>
-          <a:ln/>
-        </p:spPr>
-      </p:sp>
-      <p:sp>
-        <p:nvSpPr>
-          <p:cNvPr id="25" name="Shape 23"/>
-          <p:cNvSpPr/>
-          <p:nvPr/>
-        </p:nvSpPr>
-        <p:spPr>
-          <a:xfrm>
-            <a:off x="4572000" y="3886200"/>
-            <a:ext cx="384048" cy="384048"/>
-          </a:xfrm>
-          <a:prstGeom prst="ellipse">
-            <a:avLst/>
-          </a:prstGeom>
-          <a:solidFill>
-            <a:srgbClr val="2EC4B6"/>
-          </a:solidFill>
-          <a:ln/>
-        </p:spPr>
-      </p:sp>
-      <p:sp>
-        <p:nvSpPr>
-          <p:cNvPr id="26" name="Text 24"/>
-          <p:cNvSpPr/>
-          <p:nvPr/>
-        </p:nvSpPr>
-        <p:spPr>
-          <a:xfrm>
-            <a:off x="4572000" y="3886200"/>
-            <a:ext cx="384048" cy="384048"/>
-          </a:xfrm>
-          <a:prstGeom prst="rect">
-            <a:avLst/>
-          </a:prstGeom>
-          <a:noFill/>
-          <a:ln/>
-        </p:spPr>
-        <p:txBody>
-          <a:bodyPr wrap="square" lIns="0" tIns="0" rIns="0" bIns="0" rtlCol="0" anchor="ctr"/>
-          <a:lstStyle/>
-          <a:p>
-            <a:pPr algn="ctr" indent="0" marL="0">
-              <a:buNone/>
-            </a:pPr>
-            <a:r>
-              <a:rPr lang="en-US" sz="1200" b="1" dirty="0">
-                <a:solidFill>
-                  <a:srgbClr val="04151C"/>
-                </a:solidFill>
-                <a:latin typeface="Calibri" pitchFamily="34" charset="0"/>
-                <a:ea typeface="Calibri" pitchFamily="34" charset="-122"/>
-                <a:cs typeface="Calibri" pitchFamily="34" charset="-120"/>
-              </a:rPr>
-              <a:t>5</a:t>
-            </a:r>
-            <a:endParaRPr lang="en-US" sz="1200" dirty="0"/>
-          </a:p>
-        </p:txBody>
-      </p:sp>
-      <p:sp>
-        <p:nvSpPr>
-          <p:cNvPr id="27" name="Text 25"/>
-          <p:cNvSpPr/>
-          <p:nvPr/>
-        </p:nvSpPr>
-        <p:spPr>
-          <a:xfrm>
-            <a:off x="5074920" y="3904488"/>
-            <a:ext cx="2560320" cy="365760"/>
-          </a:xfrm>
-          <a:prstGeom prst="rect">
-            <a:avLst/>
-          </a:prstGeom>
-          <a:noFill/>
-          <a:ln/>
-        </p:spPr>
-        <p:txBody>
-          <a:bodyPr wrap="square" lIns="0" tIns="0" rIns="0" bIns="0" rtlCol="0" anchor="ctr"/>
-          <a:lstStyle/>
-          <a:p>
-            <a:pPr indent="0" marL="0">
-              <a:buNone/>
-            </a:pPr>
-            <a:r>
-              <a:rPr lang="en-US" sz="1400" dirty="0">
-                <a:solidFill>
-                  <a:srgbClr val="2EC4B6"/>
-                </a:solidFill>
-                <a:latin typeface="Calibri" pitchFamily="34" charset="0"/>
-                <a:ea typeface="Calibri" pitchFamily="34" charset="-122"/>
-                <a:cs typeface="Calibri" pitchFamily="34" charset="-120"/>
-              </a:rPr>
-              <a:t>65–80s</a:t>
-            </a:r>
-            <a:endParaRPr lang="en-US" sz="1400" dirty="0"/>
-          </a:p>
-        </p:txBody>
-      </p:sp>
-      <p:sp>
-        <p:nvSpPr>
-          <p:cNvPr id="28" name="Text 26"/>
-          <p:cNvSpPr/>
-          <p:nvPr/>
-        </p:nvSpPr>
-        <p:spPr>
-          <a:xfrm>
-            <a:off x="4572000" y="4526280"/>
-            <a:ext cx="3154680" cy="1005840"/>
-          </a:xfrm>
-          <a:prstGeom prst="rect">
-            <a:avLst/>
-          </a:prstGeom>
-          <a:noFill/>
-          <a:ln/>
-        </p:spPr>
-        <p:txBody>
-          <a:bodyPr wrap="square" lIns="0" tIns="0" rIns="0" bIns="0" rtlCol="0" anchor="ctr"/>
-          <a:lstStyle/>
-          <a:p>
-            <a:pPr indent="0" marL="0">
-              <a:buNone/>
-            </a:pPr>
-            <a:r>
-              <a:rPr lang="en-US" sz="1600" dirty="0">
-                <a:solidFill>
-                  <a:srgbClr val="E8F1F2"/>
-                </a:solidFill>
-                <a:latin typeface="Calibri" pitchFamily="34" charset="0"/>
-                <a:ea typeface="Calibri" pitchFamily="34" charset="-122"/>
-                <a:cs typeface="Calibri" pitchFamily="34" charset="-120"/>
-              </a:rPr>
-              <a:t>Second vault cascades to V8</a:t>
-            </a:r>
-            <a:endParaRPr lang="en-US" sz="1600" dirty="0"/>
-          </a:p>
-        </p:txBody>
-      </p:sp>
-      <p:sp>
-        <p:nvSpPr>
-          <p:cNvPr id="29" name="Shape 27"/>
-          <p:cNvSpPr/>
-          <p:nvPr/>
-        </p:nvSpPr>
-        <p:spPr>
-          <a:xfrm>
-            <a:off x="8138160" y="3611880"/>
-            <a:ext cx="3611880" cy="2240280"/>
-          </a:xfrm>
-          <a:prstGeom prst="roundRect">
-            <a:avLst>
-              <a:gd name="adj" fmla="val 4082"/>
-            </a:avLst>
-          </a:prstGeom>
-          <a:solidFill>
-            <a:srgbClr val="0B2430"/>
-          </a:solidFill>
-          <a:ln/>
-        </p:spPr>
-      </p:sp>
-      <p:sp>
-        <p:nvSpPr>
-          <p:cNvPr id="30" name="Shape 28"/>
-          <p:cNvSpPr/>
-          <p:nvPr/>
-        </p:nvSpPr>
-        <p:spPr>
-          <a:xfrm>
-            <a:off x="8366760" y="3886200"/>
-            <a:ext cx="384048" cy="384048"/>
-          </a:xfrm>
-          <a:prstGeom prst="ellipse">
-            <a:avLst/>
-          </a:prstGeom>
-          <a:solidFill>
-            <a:srgbClr val="2EC4B6"/>
-          </a:solidFill>
-          <a:ln/>
-        </p:spPr>
-      </p:sp>
-      <p:sp>
-        <p:nvSpPr>
-          <p:cNvPr id="31" name="Text 29"/>
-          <p:cNvSpPr/>
-          <p:nvPr/>
-        </p:nvSpPr>
-        <p:spPr>
-          <a:xfrm>
-            <a:off x="8366760" y="3886200"/>
-            <a:ext cx="384048" cy="384048"/>
-          </a:xfrm>
-          <a:prstGeom prst="rect">
-            <a:avLst/>
-          </a:prstGeom>
-          <a:noFill/>
-          <a:ln/>
-        </p:spPr>
-        <p:txBody>
-          <a:bodyPr wrap="square" lIns="0" tIns="0" rIns="0" bIns="0" rtlCol="0" anchor="ctr"/>
-          <a:lstStyle/>
-          <a:p>
-            <a:pPr algn="ctr" indent="0" marL="0">
-              <a:buNone/>
-            </a:pPr>
-            <a:r>
-              <a:rPr lang="en-US" sz="1200" b="1" dirty="0">
-                <a:solidFill>
-                  <a:srgbClr val="04151C"/>
-                </a:solidFill>
-                <a:latin typeface="Calibri" pitchFamily="34" charset="0"/>
-                <a:ea typeface="Calibri" pitchFamily="34" charset="-122"/>
-                <a:cs typeface="Calibri" pitchFamily="34" charset="-120"/>
-              </a:rPr>
-              <a:t>6</a:t>
-            </a:r>
-            <a:endParaRPr lang="en-US" sz="1200" dirty="0"/>
-          </a:p>
-        </p:txBody>
-      </p:sp>
-      <p:sp>
-        <p:nvSpPr>
-          <p:cNvPr id="32" name="Text 30"/>
-          <p:cNvSpPr/>
-          <p:nvPr/>
-        </p:nvSpPr>
-        <p:spPr>
-          <a:xfrm>
-            <a:off x="8869680" y="3904488"/>
-            <a:ext cx="2560320" cy="365760"/>
-          </a:xfrm>
-          <a:prstGeom prst="rect">
-            <a:avLst/>
-          </a:prstGeom>
-          <a:noFill/>
-          <a:ln/>
-        </p:spPr>
-        <p:txBody>
-          <a:bodyPr wrap="square" lIns="0" tIns="0" rIns="0" bIns="0" rtlCol="0" anchor="ctr"/>
-          <a:lstStyle/>
-          <a:p>
-            <a:pPr indent="0" marL="0">
-              <a:buNone/>
-            </a:pPr>
-            <a:r>
-              <a:rPr lang="en-US" sz="1400" dirty="0">
-                <a:solidFill>
-                  <a:srgbClr val="2EC4B6"/>
-                </a:solidFill>
-                <a:latin typeface="Calibri" pitchFamily="34" charset="0"/>
-                <a:ea typeface="Calibri" pitchFamily="34" charset="-122"/>
-                <a:cs typeface="Calibri" pitchFamily="34" charset="-120"/>
-              </a:rPr>
-              <a:t>80–90s</a:t>
-            </a:r>
-            <a:endParaRPr lang="en-US" sz="1400" dirty="0"/>
-          </a:p>
-        </p:txBody>
-      </p:sp>
-      <p:sp>
-        <p:nvSpPr>
-          <p:cNvPr id="33" name="Text 31"/>
-          <p:cNvSpPr/>
-          <p:nvPr/>
-        </p:nvSpPr>
-        <p:spPr>
-          <a:xfrm>
-            <a:off x="8366760" y="4526280"/>
-            <a:ext cx="3154680" cy="1005840"/>
-          </a:xfrm>
-          <a:prstGeom prst="rect">
-            <a:avLst/>
-          </a:prstGeom>
-          <a:noFill/>
-          <a:ln/>
-        </p:spPr>
-        <p:txBody>
-          <a:bodyPr wrap="square" lIns="0" tIns="0" rIns="0" bIns="0" rtlCol="0" anchor="ctr"/>
-          <a:lstStyle/>
-          <a:p>
-            <a:pPr indent="0" marL="0">
-              <a:buNone/>
-            </a:pPr>
-            <a:r>
-              <a:rPr lang="en-US" sz="1600" dirty="0">
-                <a:solidFill>
-                  <a:srgbClr val="E8F1F2"/>
-                </a:solidFill>
-                <a:latin typeface="Calibri" pitchFamily="34" charset="0"/>
-                <a:ea typeface="Calibri" pitchFamily="34" charset="-122"/>
-                <a:cs typeface="Calibri" pitchFamily="34" charset="-120"/>
-              </a:rPr>
-              <a:t>Custody PDF + kWh hold vs move</a:t>
-            </a:r>
-            <a:endParaRPr lang="en-US" sz="1600" dirty="0"/>
           </a:p>
         </p:txBody>
       </p:sp>
@@ -5226,7 +4786,24 @@
                 <a:ea typeface="Calibri" pitchFamily="34" charset="-122"/>
                 <a:cs typeface="Calibri" pitchFamily="34" charset="-120"/>
               </a:rPr>
-              <a:t>Platelets 22±2°C   ·   FFP ≤ −30°C</a:t>
+              <a:t>Platelets 22±2°C, continuous agitation</a:t>
+            </a:r>
+            <a:endParaRPr lang="en-US" sz="1800" dirty="0"/>
+          </a:p>
+          <a:p>
+            <a:pPr indent="0" marL="0">
+              <a:buNone/>
+            </a:pPr>
+            <a:r>
+              <a:rPr lang="en-US" sz="1800" dirty="0">
+                <a:solidFill>
+                  <a:srgbClr val="E8F1F2"/>
+                </a:solidFill>
+                <a:latin typeface="Calibri" pitchFamily="34" charset="0"/>
+                <a:ea typeface="Calibri" pitchFamily="34" charset="-122"/>
+                <a:cs typeface="Calibri" pitchFamily="34" charset="-120"/>
+              </a:rPr>
+              <a:t>FFP ≤ −30°C</a:t>
             </a:r>
             <a:endParaRPr lang="en-US" sz="1800" dirty="0"/>
           </a:p>
